--- a/curso_es/pptx/S37.pptx
+++ b/curso_es/pptx/S37.pptx
@@ -4335,7 +4335,7 @@
                 </a:solidFill>
                 <a:latin typeface="Fredoka"/>
               </a:rPr>
-              <a:t>Caso 3 · Dos clases</a:t>
+              <a:t>Caso 3 · Dos institutos</a:t>
             </a:r>
           </a:p>
         </p:txBody>
@@ -4417,7 +4417,7 @@
                 </a:solidFill>
                 <a:latin typeface="Nunito Sans"/>
               </a:rPr>
-              <a:t>En la clase A hay 20 aprobados. En la clase B hay 15. ¿Qué clase lo hizo mejor? (Ejemplo inventado.)</a:t>
+              <a:t>En el instituto A hay 20 aprobados. En el instituto B hay 15. ¿Qué instituto lo hizo mejor? (Ejemplo inventado.)</a:t>
             </a:r>
           </a:p>
         </p:txBody>
